--- a/reports/2026-10-20/YouTube_AI趨勢研究雷達_2026-10-20_簡報.pptx
+++ b/reports/2026-10-20/YouTube_AI趨勢研究雷達_2026-10-20_簡報.pptx
@@ -3257,37 +3257,37 @@
           <a:lstStyle/>
           <a:p>
             <a:r>
-              <a:t>1. THE FIRST PROMPT｜33,046</a:t>
-            </a:r>
-          </a:p>
-          <a:p>
-            <a:r>
-              <a:t>2. 【最新副業】Canva×AIデジタルペーパー副業‼️月10万円を稼ぐ全手順・ロードマップ｜25,917</a:t>
-            </a:r>
-          </a:p>
-          <a:p>
-            <a:r>
-              <a:t>3. 【視聴者が実際に稼いだ‼️】AI動画で2ヶ月で登録者10万人！顔出し・声出しなしでAI×YouTubeで月●●｜25,010</a:t>
-            </a:r>
-          </a:p>
-          <a:p>
-            <a:r>
-              <a:t>4. 【詰みます】AI×noteで稼げるのは今だけ？収益化の弊害が出る構造的理由｜14,022</a:t>
-            </a:r>
-          </a:p>
-          <a:p>
-            <a:r>
-              <a:t>5. 滿手台股AI股，小心只賺到上半場！AI下半場獲利這邊看｜峰哥、超馬芭樂│Smart投資教室｜12,722</a:t>
-            </a:r>
-          </a:p>
-          <a:p>
-            <a:r>
-              <a:t>6. 黄仁勋算账：AI收入撑得起几万亿美元的资本开支吗​ | 黄仁勋 | 英伟达 | AI泡沫 | 资本开支 | A｜11,502</a:t>
-            </a:r>
-          </a:p>
-          <a:p>
-            <a:r>
-              <a:t>7. 【2027年版】Threads×note完全攻略！Claudeで自動化する全手順｜スレッズAI副業の始め方｜7,541</a:t>
+              <a:t>1. THE FIRST PROMPT｜33,119</a:t>
+            </a:r>
+          </a:p>
+          <a:p>
+            <a:r>
+              <a:t>2. 【最新副業】Canva×AIデジタルペーパー副業‼️月10万円を稼ぐ全手順・ロードマップ｜26,028</a:t>
+            </a:r>
+          </a:p>
+          <a:p>
+            <a:r>
+              <a:t>3. 【視聴者が実際に稼いだ‼️】AI動画で2ヶ月で登録者10万人！顔出し・声出しなしでAI×YouTubeで月●●｜25,199</a:t>
+            </a:r>
+          </a:p>
+          <a:p>
+            <a:r>
+              <a:t>4. 【詰みます】AI×noteで稼げるのは今だけ？収益化の弊害が出る構造的理由｜14,133</a:t>
+            </a:r>
+          </a:p>
+          <a:p>
+            <a:r>
+              <a:t>5. 滿手台股AI股，小心只賺到上半場！AI下半場獲利這邊看｜峰哥、超馬芭樂│Smart投資教室｜13,010</a:t>
+            </a:r>
+          </a:p>
+          <a:p>
+            <a:r>
+              <a:t>6. 黄仁勋算账：AI收入撑得起几万亿美元的资本开支吗​ | 黄仁勋 | 英伟达 | AI泡沫 | 资本开支 | A｜11,837</a:t>
+            </a:r>
+          </a:p>
+          <a:p>
+            <a:r>
+              <a:t>7. 【2027年版】Threads×note完全攻略！Claudeで自動化する全手順｜スレッズAI副業の始め方｜7,568</a:t>
             </a:r>
           </a:p>
         </p:txBody>
